--- a/Software Design/07. Introduction To Software Architecture.pptx
+++ b/Software Design/07. Introduction To Software Architecture.pptx
@@ -5,10 +5,10 @@
     <p:sldMasterId id="2147483708" r:id="rId1"/>
   </p:sldMasterIdLst>
   <p:notesMasterIdLst>
-    <p:notesMasterId r:id="rId55"/>
+    <p:notesMasterId r:id="rId56"/>
   </p:notesMasterIdLst>
   <p:handoutMasterIdLst>
-    <p:handoutMasterId r:id="rId56"/>
+    <p:handoutMasterId r:id="rId57"/>
   </p:handoutMasterIdLst>
   <p:sldIdLst>
     <p:sldId id="256" r:id="rId2"/>
@@ -53,17 +53,18 @@
     <p:sldId id="789" r:id="rId41"/>
     <p:sldId id="786" r:id="rId42"/>
     <p:sldId id="785" r:id="rId43"/>
-    <p:sldId id="757" r:id="rId44"/>
-    <p:sldId id="758" r:id="rId45"/>
-    <p:sldId id="794" r:id="rId46"/>
-    <p:sldId id="759" r:id="rId47"/>
-    <p:sldId id="776" r:id="rId48"/>
-    <p:sldId id="787" r:id="rId49"/>
-    <p:sldId id="760" r:id="rId50"/>
-    <p:sldId id="761" r:id="rId51"/>
-    <p:sldId id="769" r:id="rId52"/>
-    <p:sldId id="802" r:id="rId53"/>
-    <p:sldId id="359" r:id="rId54"/>
+    <p:sldId id="813" r:id="rId44"/>
+    <p:sldId id="757" r:id="rId45"/>
+    <p:sldId id="758" r:id="rId46"/>
+    <p:sldId id="794" r:id="rId47"/>
+    <p:sldId id="759" r:id="rId48"/>
+    <p:sldId id="776" r:id="rId49"/>
+    <p:sldId id="787" r:id="rId50"/>
+    <p:sldId id="760" r:id="rId51"/>
+    <p:sldId id="761" r:id="rId52"/>
+    <p:sldId id="769" r:id="rId53"/>
+    <p:sldId id="802" r:id="rId54"/>
+    <p:sldId id="359" r:id="rId55"/>
   </p:sldIdLst>
   <p:sldSz cx="9144000" cy="6858000" type="screen4x3"/>
   <p:notesSz cx="6858000" cy="9144000"/>
@@ -278,7 +279,7 @@
             <a:fld id="{B8B5CE0D-E8F9-4F17-B1ED-147CA73C5D15}" type="datetimeFigureOut">
               <a:rPr lang="en-US" smtClean="0"/>
               <a:pPr/>
-              <a:t>2/7/2026</a:t>
+              <a:t>5/19/2026</a:t>
             </a:fld>
             <a:endParaRPr lang="en-US"/>
           </a:p>
@@ -440,7 +441,7 @@
             <a:fld id="{AD4026E6-0412-4830-8F06-DF45033103D5}" type="datetimeFigureOut">
               <a:rPr lang="en-US" smtClean="0"/>
               <a:pPr/>
-              <a:t>2/7/2026</a:t>
+              <a:t>5/19/2026</a:t>
             </a:fld>
             <a:endParaRPr lang="en-US"/>
           </a:p>
@@ -897,7 +898,7 @@
               <a:pPr>
                 <a:defRPr/>
               </a:pPr>
-              <a:t>2/7/2026</a:t>
+              <a:t>5/19/2026</a:t>
             </a:fld>
             <a:endParaRPr lang="en-US"/>
           </a:p>
@@ -1089,7 +1090,7 @@
               <a:pPr>
                 <a:defRPr/>
               </a:pPr>
-              <a:t>2/7/2026</a:t>
+              <a:t>5/19/2026</a:t>
             </a:fld>
             <a:endParaRPr lang="en-US"/>
           </a:p>
@@ -1291,7 +1292,7 @@
               <a:pPr>
                 <a:defRPr/>
               </a:pPr>
-              <a:t>2/7/2026</a:t>
+              <a:t>5/19/2026</a:t>
             </a:fld>
             <a:endParaRPr lang="en-US"/>
           </a:p>
@@ -1483,7 +1484,7 @@
               <a:pPr>
                 <a:defRPr/>
               </a:pPr>
-              <a:t>2/7/2026</a:t>
+              <a:t>5/19/2026</a:t>
             </a:fld>
             <a:endParaRPr lang="en-US"/>
           </a:p>
@@ -1751,7 +1752,7 @@
               <a:pPr>
                 <a:defRPr/>
               </a:pPr>
-              <a:t>2/7/2026</a:t>
+              <a:t>5/19/2026</a:t>
             </a:fld>
             <a:endParaRPr lang="en-US"/>
           </a:p>
@@ -2061,7 +2062,7 @@
               <a:pPr>
                 <a:defRPr/>
               </a:pPr>
-              <a:t>2/7/2026</a:t>
+              <a:t>5/19/2026</a:t>
             </a:fld>
             <a:endParaRPr lang="en-US"/>
           </a:p>
@@ -2505,7 +2506,7 @@
               <a:pPr>
                 <a:defRPr/>
               </a:pPr>
-              <a:t>2/7/2026</a:t>
+              <a:t>5/19/2026</a:t>
             </a:fld>
             <a:endParaRPr lang="en-US"/>
           </a:p>
@@ -2645,7 +2646,7 @@
               <a:pPr>
                 <a:defRPr/>
               </a:pPr>
-              <a:t>2/7/2026</a:t>
+              <a:t>5/19/2026</a:t>
             </a:fld>
             <a:endParaRPr lang="en-US"/>
           </a:p>
@@ -2762,7 +2763,7 @@
               <a:pPr>
                 <a:defRPr/>
               </a:pPr>
-              <a:t>2/7/2026</a:t>
+              <a:t>5/19/2026</a:t>
             </a:fld>
             <a:endParaRPr lang="en-US"/>
           </a:p>
@@ -3061,7 +3062,7 @@
               <a:pPr>
                 <a:defRPr/>
               </a:pPr>
-              <a:t>2/7/2026</a:t>
+              <a:t>5/19/2026</a:t>
             </a:fld>
             <a:endParaRPr lang="en-US"/>
           </a:p>
@@ -3339,7 +3340,7 @@
               <a:pPr>
                 <a:defRPr/>
               </a:pPr>
-              <a:t>2/7/2026</a:t>
+              <a:t>5/19/2026</a:t>
             </a:fld>
             <a:endParaRPr lang="en-US"/>
           </a:p>
@@ -3587,7 +3588,7 @@
               <a:pPr>
                 <a:defRPr/>
               </a:pPr>
-              <a:t>2/7/2026</a:t>
+              <a:t>5/19/2026</a:t>
             </a:fld>
             <a:endParaRPr lang="en-US"/>
           </a:p>
@@ -7348,11 +7349,7 @@
           <a:p>
             <a:r>
               <a:rPr lang="en-US" dirty="0" smtClean="0"/>
-              <a:t>Logical </a:t>
-            </a:r>
-            <a:r>
-              <a:rPr lang="en-US" dirty="0" smtClean="0"/>
-              <a:t>View Questions</a:t>
+              <a:t>Logical View Questions</a:t>
             </a:r>
             <a:endParaRPr lang="en-US" dirty="0"/>
           </a:p>
@@ -7387,11 +7384,7 @@
           <a:p>
             <a:r>
               <a:rPr lang="en-US" sz="2400" dirty="0" smtClean="0"/>
-              <a:t>Which languages and </a:t>
-            </a:r>
-            <a:r>
-              <a:rPr lang="en-US" sz="2400" dirty="0" smtClean="0"/>
-              <a:t>technologies will be used to implement each component?</a:t>
+              <a:t>Which languages and technologies will be used to implement each component?</a:t>
             </a:r>
             <a:endParaRPr lang="en-US" sz="2400" dirty="0"/>
           </a:p>
@@ -7910,8 +7903,27 @@
             </a:pPr>
             <a:r>
               <a:rPr lang="en-US" sz="2400" dirty="0" smtClean="0"/>
-              <a:t>Architecture Design Method</a:t>
-            </a:r>
+              <a:t>Architecture Design </a:t>
+            </a:r>
+            <a:r>
+              <a:rPr lang="en-US" sz="2400" dirty="0" smtClean="0"/>
+              <a:t>Method</a:t>
+            </a:r>
+          </a:p>
+          <a:p>
+            <a:pPr marL="571500" indent="-571500">
+              <a:buFont typeface="+mj-lt"/>
+              <a:buAutoNum type="romanUcPeriod"/>
+            </a:pPr>
+            <a:r>
+              <a:rPr lang="en-US" sz="2400" dirty="0" smtClean="0"/>
+              <a:t>Architecture </a:t>
+            </a:r>
+            <a:r>
+              <a:rPr lang="en-US" sz="2400" dirty="0" smtClean="0"/>
+              <a:t>Reconstruction</a:t>
+            </a:r>
+            <a:endParaRPr lang="en-US" sz="2400" dirty="0" smtClean="0"/>
           </a:p>
           <a:p>
             <a:pPr marL="571500" indent="-571500">
@@ -8569,11 +8581,7 @@
           <a:p>
             <a:r>
               <a:rPr lang="en-US" sz="2400" dirty="0" smtClean="0"/>
-              <a:t>What </a:t>
-            </a:r>
-            <a:r>
-              <a:rPr lang="en-US" sz="2400" dirty="0" smtClean="0"/>
-              <a:t>are the inputs and outputs of each communication step?</a:t>
+              <a:t>What are the inputs and outputs of each communication step?</a:t>
             </a:r>
           </a:p>
         </p:txBody>
@@ -8761,25 +8769,13 @@
           <a:p>
             <a:r>
               <a:rPr lang="en-US" sz="2400" dirty="0" smtClean="0"/>
-              <a:t>Which </a:t>
-            </a:r>
-            <a:r>
-              <a:rPr lang="en-US" sz="2400" dirty="0" smtClean="0"/>
-              <a:t>languages and technologies are used to implement each component?</a:t>
-            </a:r>
-          </a:p>
-          <a:p>
-            <a:r>
-              <a:rPr lang="en-US" sz="2400" dirty="0" smtClean="0"/>
-              <a:t>What </a:t>
-            </a:r>
-            <a:r>
-              <a:rPr lang="en-US" sz="2400" dirty="0" smtClean="0"/>
-              <a:t>checkpoints are defined </a:t>
-            </a:r>
-            <a:r>
-              <a:rPr lang="en-US" sz="2400" dirty="0" smtClean="0"/>
-              <a:t>for authentication and authorization?</a:t>
+              <a:t>Which languages and technologies are used to implement each component?</a:t>
+            </a:r>
+          </a:p>
+          <a:p>
+            <a:r>
+              <a:rPr lang="en-US" sz="2400" dirty="0" smtClean="0"/>
+              <a:t>What checkpoints are defined for authentication and authorization?</a:t>
             </a:r>
             <a:endParaRPr lang="en-US" sz="2400" dirty="0"/>
           </a:p>
@@ -8939,11 +8935,7 @@
           <a:p>
             <a:r>
               <a:rPr lang="en-US" dirty="0" smtClean="0"/>
-              <a:t>Persistence View</a:t>
-            </a:r>
-            <a:r>
-              <a:rPr lang="en-US" dirty="0" smtClean="0"/>
-              <a:t> Questions</a:t>
+              <a:t>Persistence View Questions</a:t>
             </a:r>
             <a:endParaRPr lang="en-US" dirty="0"/>
           </a:p>
@@ -10049,6 +10041,73 @@
           <a:chExt cx="0" cy="0"/>
         </a:xfrm>
       </p:grpSpPr>
+      <p:sp>
+        <p:nvSpPr>
+          <p:cNvPr id="2" name="Title 1"/>
+          <p:cNvSpPr>
+            <a:spLocks noGrp="1"/>
+          </p:cNvSpPr>
+          <p:nvPr>
+            <p:ph type="title"/>
+          </p:nvPr>
+        </p:nvSpPr>
+        <p:spPr/>
+        <p:txBody>
+          <a:bodyPr/>
+          <a:lstStyle/>
+          <a:p>
+            <a:r>
+              <a:rPr lang="en-US" dirty="0" smtClean="0"/>
+              <a:t>Architecture Reconstruction</a:t>
+            </a:r>
+            <a:endParaRPr lang="en-US" dirty="0"/>
+          </a:p>
+        </p:txBody>
+      </p:sp>
+      <p:sp>
+        <p:nvSpPr>
+          <p:cNvPr id="3" name="Content Placeholder 2"/>
+          <p:cNvSpPr>
+            <a:spLocks noGrp="1"/>
+          </p:cNvSpPr>
+          <p:nvPr>
+            <p:ph idx="1"/>
+          </p:nvPr>
+        </p:nvSpPr>
+        <p:spPr/>
+        <p:txBody>
+          <a:bodyPr/>
+          <a:lstStyle/>
+          <a:p>
+            <a:endParaRPr lang="en-US"/>
+          </a:p>
+        </p:txBody>
+      </p:sp>
+    </p:spTree>
+  </p:cSld>
+  <p:clrMapOvr>
+    <a:masterClrMapping/>
+  </p:clrMapOvr>
+</p:sld>
+</file>
+
+<file path=ppt/slides/slide44.xml><?xml version="1.0" encoding="utf-8"?>
+<p:sld xmlns:a="http://schemas.openxmlformats.org/drawingml/2006/main" xmlns:r="http://schemas.openxmlformats.org/officeDocument/2006/relationships" xmlns:p="http://schemas.openxmlformats.org/presentationml/2006/main">
+  <p:cSld>
+    <p:spTree>
+      <p:nvGrpSpPr>
+        <p:cNvPr id="1" name=""/>
+        <p:cNvGrpSpPr/>
+        <p:nvPr/>
+      </p:nvGrpSpPr>
+      <p:grpSpPr>
+        <a:xfrm>
+          <a:off x="0" y="0"/>
+          <a:ext cx="0" cy="0"/>
+          <a:chOff x="0" y="0"/>
+          <a:chExt cx="0" cy="0"/>
+        </a:xfrm>
+      </p:grpSpPr>
       <p:pic>
         <p:nvPicPr>
           <p:cNvPr id="4" name="Picture 2" descr="https://lh3.ggpht.com/1IfZLL2QDSjZ0wS7sUhaMlsAOS8BBzdR3wZ1WawgRn7KZAM8nEVZYMOUM-lqQb0ikIzp=w300"/>
@@ -10083,7 +10142,7 @@
 </p:sld>
 </file>
 
-<file path=ppt/slides/slide44.xml><?xml version="1.0" encoding="utf-8"?>
+<file path=ppt/slides/slide45.xml><?xml version="1.0" encoding="utf-8"?>
 <p:sld xmlns:a="http://schemas.openxmlformats.org/drawingml/2006/main" xmlns:r="http://schemas.openxmlformats.org/officeDocument/2006/relationships" xmlns:p="http://schemas.openxmlformats.org/presentationml/2006/main">
   <p:cSld>
     <p:spTree>
@@ -10338,7 +10397,7 @@
 </p:sld>
 </file>
 
-<file path=ppt/slides/slide45.xml><?xml version="1.0" encoding="utf-8"?>
+<file path=ppt/slides/slide46.xml><?xml version="1.0" encoding="utf-8"?>
 <p:sld xmlns:a="http://schemas.openxmlformats.org/drawingml/2006/main" xmlns:r="http://schemas.openxmlformats.org/officeDocument/2006/relationships" xmlns:p="http://schemas.openxmlformats.org/presentationml/2006/main">
   <p:cSld>
     <p:spTree>
@@ -10601,7 +10660,7 @@
 </p:sld>
 </file>
 
-<file path=ppt/slides/slide46.xml><?xml version="1.0" encoding="utf-8"?>
+<file path=ppt/slides/slide47.xml><?xml version="1.0" encoding="utf-8"?>
 <p:sld xmlns:a="http://schemas.openxmlformats.org/drawingml/2006/main" xmlns:r="http://schemas.openxmlformats.org/officeDocument/2006/relationships" xmlns:p="http://schemas.openxmlformats.org/presentationml/2006/main">
   <p:cSld>
     <p:spTree>
@@ -10804,7 +10863,7 @@
 </p:sld>
 </file>
 
-<file path=ppt/slides/slide47.xml><?xml version="1.0" encoding="utf-8"?>
+<file path=ppt/slides/slide48.xml><?xml version="1.0" encoding="utf-8"?>
 <p:sld xmlns:a="http://schemas.openxmlformats.org/drawingml/2006/main" xmlns:r="http://schemas.openxmlformats.org/officeDocument/2006/relationships" xmlns:p="http://schemas.openxmlformats.org/presentationml/2006/main">
   <p:cSld>
     <p:spTree>
@@ -11012,7 +11071,7 @@
 </p:sld>
 </file>
 
-<file path=ppt/slides/slide48.xml><?xml version="1.0" encoding="utf-8"?>
+<file path=ppt/slides/slide49.xml><?xml version="1.0" encoding="utf-8"?>
 <p:sld xmlns:a="http://schemas.openxmlformats.org/drawingml/2006/main" xmlns:r="http://schemas.openxmlformats.org/officeDocument/2006/relationships" xmlns:p="http://schemas.openxmlformats.org/presentationml/2006/main">
   <p:cSld>
     <p:spTree>
@@ -11063,285 +11122,6 @@
 </p:sld>
 </file>
 
-<file path=ppt/slides/slide49.xml><?xml version="1.0" encoding="utf-8"?>
-<p:sld xmlns:a="http://schemas.openxmlformats.org/drawingml/2006/main" xmlns:r="http://schemas.openxmlformats.org/officeDocument/2006/relationships" xmlns:p="http://schemas.openxmlformats.org/presentationml/2006/main">
-  <p:cSld>
-    <p:spTree>
-      <p:nvGrpSpPr>
-        <p:cNvPr id="1" name=""/>
-        <p:cNvGrpSpPr/>
-        <p:nvPr/>
-      </p:nvGrpSpPr>
-      <p:grpSpPr>
-        <a:xfrm>
-          <a:off x="0" y="0"/>
-          <a:ext cx="0" cy="0"/>
-          <a:chOff x="0" y="0"/>
-          <a:chExt cx="0" cy="0"/>
-        </a:xfrm>
-      </p:grpSpPr>
-      <p:sp>
-        <p:nvSpPr>
-          <p:cNvPr id="3" name="Content Placeholder 2"/>
-          <p:cNvSpPr>
-            <a:spLocks noGrp="1"/>
-          </p:cNvSpPr>
-          <p:nvPr>
-            <p:ph idx="1"/>
-          </p:nvPr>
-        </p:nvSpPr>
-        <p:spPr/>
-        <p:txBody>
-          <a:bodyPr/>
-          <a:lstStyle/>
-          <a:p>
-            <a:r>
-              <a:rPr lang="en-US" sz="2400" i="1" dirty="0" smtClean="0">
-                <a:solidFill>
-                  <a:srgbClr val="C00000"/>
-                </a:solidFill>
-              </a:rPr>
-              <a:t>Development time</a:t>
-            </a:r>
-            <a:r>
-              <a:rPr lang="en-US" sz="2400" dirty="0" smtClean="0"/>
-              <a:t> reduction</a:t>
-            </a:r>
-          </a:p>
-          <a:p>
-            <a:pPr lvl="1"/>
-            <a:r>
-              <a:rPr lang="en-US" sz="2000" dirty="0" smtClean="0"/>
-              <a:t>Implementable (business cases support).</a:t>
-            </a:r>
-          </a:p>
-          <a:p>
-            <a:pPr lvl="1"/>
-            <a:r>
-              <a:rPr lang="en-US" sz="2000" dirty="0" smtClean="0"/>
-              <a:t>Understandability</a:t>
-            </a:r>
-          </a:p>
-          <a:p>
-            <a:pPr lvl="2"/>
-            <a:r>
-              <a:rPr lang="en-US" sz="1600" dirty="0" smtClean="0"/>
-              <a:t>Screaming (expressing its core business purpose)</a:t>
-            </a:r>
-          </a:p>
-          <a:p>
-            <a:pPr lvl="1"/>
-            <a:r>
-              <a:rPr lang="en-US" sz="2000" dirty="0" smtClean="0"/>
-              <a:t>Modular.</a:t>
-            </a:r>
-          </a:p>
-          <a:p>
-            <a:pPr lvl="2"/>
-            <a:r>
-              <a:rPr lang="en-US" sz="1600" dirty="0" smtClean="0"/>
-              <a:t>Independent UI. The UI can change easily.</a:t>
-            </a:r>
-          </a:p>
-          <a:p>
-            <a:pPr lvl="2"/>
-            <a:r>
-              <a:rPr lang="en-US" sz="1600" dirty="0" smtClean="0"/>
-              <a:t>Independent of any external agency.</a:t>
-            </a:r>
-          </a:p>
-          <a:p>
-            <a:pPr lvl="2"/>
-            <a:r>
-              <a:rPr lang="en-US" sz="1600" dirty="0" smtClean="0"/>
-              <a:t>Independent of the database and frameworks.</a:t>
-            </a:r>
-          </a:p>
-          <a:p>
-            <a:pPr lvl="2"/>
-            <a:r>
-              <a:rPr lang="en-US" sz="1600" dirty="0" smtClean="0"/>
-              <a:t>The business rules can be tested without the UI, </a:t>
-            </a:r>
-          </a:p>
-          <a:p>
-            <a:pPr lvl="2">
-              <a:buNone/>
-            </a:pPr>
-            <a:r>
-              <a:rPr lang="en-US" sz="1600" dirty="0" smtClean="0"/>
-              <a:t>	database, web server, or any other external element.</a:t>
-            </a:r>
-          </a:p>
-          <a:p>
-            <a:r>
-              <a:rPr lang="en-US" sz="2400" i="1" dirty="0" smtClean="0">
-                <a:solidFill>
-                  <a:srgbClr val="C00000"/>
-                </a:solidFill>
-              </a:rPr>
-              <a:t>Deployment time</a:t>
-            </a:r>
-            <a:r>
-              <a:rPr lang="en-US" sz="2400" dirty="0" smtClean="0"/>
-              <a:t> reduction</a:t>
-            </a:r>
-          </a:p>
-          <a:p>
-            <a:pPr lvl="1"/>
-            <a:r>
-              <a:rPr lang="en-US" sz="2000" dirty="0" smtClean="0"/>
-              <a:t>Units of deployment (DLLs, JARs, PHP files, gem files) are </a:t>
-            </a:r>
-            <a:r>
-              <a:rPr lang="en-US" sz="2000" u="sng" dirty="0" smtClean="0"/>
-              <a:t>few</a:t>
-            </a:r>
-            <a:r>
-              <a:rPr lang="en-US" sz="2000" dirty="0" smtClean="0"/>
-              <a:t>.</a:t>
-            </a:r>
-          </a:p>
-          <a:p>
-            <a:pPr lvl="1"/>
-            <a:r>
-              <a:rPr lang="en-US" sz="2000" dirty="0" smtClean="0"/>
-              <a:t>Deployed with a </a:t>
-            </a:r>
-            <a:r>
-              <a:rPr lang="en-US" sz="2000" u="sng" dirty="0" smtClean="0"/>
-              <a:t>single action</a:t>
-            </a:r>
-            <a:r>
-              <a:rPr lang="en-US" sz="2000" dirty="0" smtClean="0"/>
-              <a:t>.</a:t>
-            </a:r>
-          </a:p>
-        </p:txBody>
-      </p:sp>
-      <p:pic>
-        <p:nvPicPr>
-          <p:cNvPr id="2055" name="Picture 7"/>
-          <p:cNvPicPr>
-            <a:picLocks noChangeAspect="1" noChangeArrowheads="1"/>
-          </p:cNvPicPr>
-          <p:nvPr/>
-        </p:nvPicPr>
-        <p:blipFill>
-          <a:blip r:embed="rId2" cstate="print"/>
-          <a:srcRect/>
-          <a:stretch>
-            <a:fillRect/>
-          </a:stretch>
-        </p:blipFill>
-        <p:spPr bwMode="auto">
-          <a:xfrm>
-            <a:off x="6172200" y="2034540"/>
-            <a:ext cx="2369820" cy="2232660"/>
-          </a:xfrm>
-          <a:prstGeom prst="rect">
-            <a:avLst/>
-          </a:prstGeom>
-          <a:noFill/>
-          <a:ln w="9525">
-            <a:noFill/>
-            <a:miter lim="800000"/>
-            <a:headEnd/>
-            <a:tailEnd/>
-          </a:ln>
-        </p:spPr>
-      </p:pic>
-      <p:sp>
-        <p:nvSpPr>
-          <p:cNvPr id="2" name="Title 1"/>
-          <p:cNvSpPr>
-            <a:spLocks noGrp="1"/>
-          </p:cNvSpPr>
-          <p:nvPr>
-            <p:ph type="title"/>
-          </p:nvPr>
-        </p:nvSpPr>
-        <p:spPr/>
-        <p:txBody>
-          <a:bodyPr/>
-          <a:lstStyle/>
-          <a:p>
-            <a:r>
-              <a:rPr lang="en-US" dirty="0" smtClean="0"/>
-              <a:t>“Good” Architecture (I)</a:t>
-            </a:r>
-            <a:endParaRPr lang="en-US" dirty="0"/>
-          </a:p>
-        </p:txBody>
-      </p:sp>
-      <p:sp>
-        <p:nvSpPr>
-          <p:cNvPr id="2050" name="AutoShape 2" descr="data:image/png;base64,iVBORw0KGgoAAAANSUhEUgAAANwAAADlCAMAAAAP8WnWAAAA9lBMVEX+/v4OdLz8/////fwPdLoNdroAc8E5fKv9/v8RdLb///3//f79//7///oAc7/5//9HiLgAbrlbmMMAabD///cQdbUJdsEAZqvP6O////MAa7cAbboAbrUAZ7Dz//+QutUAZqiy1eeUvtkAZ7YHebYAZagAdsYAaqkZcaxCjL/C5O/q//8AaaQAbsBloMhxpMmZvdMqgbxKlMJopsOTvc2109zd7vKZyODT8Ph5pcFypcxJhLlzq8PG6fG01edWjLSny+aGstFdlbmty9s/i8YNeKuArs+WuM1uqdBNk8NMibLn8fLY5/E0eKUAZ5punr9UhqrB3PD9Dq3ZAAAODUlEQVR4nO2d+1saORfHc6WTzGSGYS5yGUZQBASx0FbEtmurrrbV7vr2//9n3mS8bNu12zCgTHj8/qCCj5qPyeSck8s5ACxZgnuOEF51vD9hhESTV6/fHEw9LmzLEV4qxLL/3pPK4YKDg/L2KCGUEAhJQpJWVDmcgRAIjKxVt28hedxJr+vduK/AWMQocd1SoxS0yodDHmJ71e1bSA5Py/WIwpgSKsUY60hFEMJG//UMYGBy32F0JPtNDslsUMYxhK7ryk4k8o2k9XYKasJCtu2sup25xAc7XfiwGCP+3iESIcd41c3MqbLstwfZ1DBlpP5uJmwhbCMfvkEQs/jXcAmkrY/IMxTuxO/0u7/sOjnTlGDvDcDCuIfOsjD40/3FE/edgiMvdBCy+KobPI8sG6e937NBf++9h7FhVgHZfLajA0d7mwgLjlbd4HmEMP9j4/dsRDqdzWMPmwVnYz7bgOTh6eQ7OCqtezIVnkmTCreBGLaUK6IzND8gbtIzx7kl0gn5fdcpRfUzYRach0ElyYbdb0Xj/tCk4I4LCXeSxIRpwMXM36ytusXz6jiAkQYblAFfL1VdbdLYnLaIFhyJ4voYCKMmFYD6VAuOyni248mBaVL0I/a1HjmootntQegJk+D42I8eDnl+gpMWo/SW29wo73lQjzQCg0xuPzUrrLOvAq1hqRRvDMzqOEt0oI6HksH5mxybNF06YtfVhYPupWMUHAdvfV02SvdSo5ZpOTip68IR0qsaBrdV1zEFGRz0D1bd3rnE+cdAGy4evVl1e+eSJdpN7QmFlS4MMwXtQBsuciurbu9cmg+udLnq9s6leeBiZhgcknC6HRezbnnV7Z1L88yWMZVwZnkoW9oeCjRtWApwog8XlT6sur1ziYN9fw5TsG+YndvVDnkoHG0Ck9bUgYi0VpyVmDs64ybBzROJU7c+MOpcg/1Nfw2Fwp2hbdI+Fh83tFa/lIjb8YyCE5US09kIUXJHL81aQ/H2YqbtWzbbZsFVN+AvzqE8ANebmrW0N07kDK87LF8BbAodd2wMdqGeDaeQscZhiGxD9goU3FTnqEYGRwkMhjVkGQIHHIzeJLpwLPZfgtCciMfBXlmTDcI+3KgCxE2hs3g40DkdlYlE8B0CnjF+M8LhZ+1YjsSNLUMmyhvhYUvXxGVGzqSjGhhsJtqxHCmdApPgeNqHkXYsV2/XTPGZbeQIMC5Frq53whIPmPLM2ZYQ6d8j7VEJk8/KDpghCYfes5GvPSxbA2CMGeCcz3qEUd1QDjIBhLfqVmvKE6jiwkiTLSbuZ4GMOaGORbup22lqHT048Bxuis8cDvu682R2sWdviIAp0Q5IT33t5UpII/cUYNuYWyGHTdLXnkxoNBpzM+BsywsHWg8cYZG6akYhCarhqputJxSKmVavyXFLog513T6JhoYYcCQ8CjWW0AmTJiBgrRbsjsqmnCHlwy+JzlUCIsdkr51ODzbLG0erbrSOpBlG6Iuvtwwr+/cyFUIOyOGVJz87BY8K7LRmXepG3zSGvT88IMJQcOSp6+Srbv5/ysJ8+kLXeBMKY7h3+ulgCpRHo7Tq9v+38B/+qKMLxyTdaOQnvej6rOpxhAo8LNWaXHuP6HtdVNJFHfl8ltwk6H9uT+/MAecqbuX3v1bOpPhe6j356UfT8ZhzrW3LCcEKvTcb+qdib7uP3MWzfr1Oytcn47PjwVQqTb8LgPh3unmV0Ysw45RzmMr18Fj9btuO59WG+3X9bntIbrc72m7U682g10uU60KiyWTy56tXlf3KvV69Ui9evz7ZHJ99qw5TxLn84x54tLvmCMjJoN339RfyHhQ9P+90SHb5X/YoU1KvfN9vJORWiXwlffIkcV3X95s7/fLF2VfA5Yz7WD3nYHt41JLt0faVf9V3pa7rxnFMb5UN2ZuvSPaB3H2Hskh6pt1YOQN7/f12uvRFCsvC2PIEFuAsKlH9GOcXIrcYhLjxzavsHdf9bg3NvXvllqQok/9PtzQaBedjzxZ8iTvqiiwNQ9sblDf017keQUQCBv0BCJ0lRk2OfJhDNPjQo3o3AB9NlI66tPcRLPHBQ9IAeMeveqOkr7sU9Ehi0lyS0t6xvZiToyZcOwua1VfDrUnPb8hnhNCV9pxbop0I+uez3IchlFMg7aeDLMtypK+bHl+3GotZtqWqy9wKB16uaxcWQpYcicjJPITp2X7L73ZJf5UTyY+KWbxT5ThX5+FQYOm8c46uDk7eBUECaUQjrTubTyN1ZfsU5NwrkgNxOGuP91/s9Uh8my0JLuiULFNMxhnBrJbmmVQscNHvB0FdGU8XKusZxwVCy26G0sZhPmtgg4r+SadVqVQBOe9xVVZrqXUU76VibeFga1Zzctm6y+LDkWRQyxMeOKDsFh9u9BHkGZZGwLHReJ3hPq0z3Br3HCy9yXWcxQw4v22vLRzxq7n8LyPgWDCt5YtXXxQfjiYoFxxGL0pa+clWKXcf5EofZgRccphvcdYEOHdvir08mwZGwL1CawoXM3fjGORb3Cs8HCHxizQPmQlwUdwa5F1xLjwc9Y9y7x8XCo7EUG04x1I3m1oJIfXdFOc9bFsgODfpbdSDZrPZ6u31+ufn55PJ7u7u/lDkPklcILjkcDCofp3NhkqeksO5UAvieQ//FQcuueBhraZO5aj9Jgc5jvqa14CXO+duceD8/QdyPnseAjh3foDiwMHeyzfjT582Ly4+7+9XvnyRz9tk0mHvrmq5710UCC6GiZ/cKDv+TaDaJkwuvTDvtnGB4CSeC+9Optwf6YCjce498QLBMUgYi6Sygzh3cMTtDc2fLaHrxt+dwcnGpRTpN7bCnHviBYJ7WLRfeqEWLfPMmMWHi7rNGQC5FmULD8dI7G+pgyRrCQcZOwXWesKptk2Qg/MY8sLDKSUewms5oSg1r9YYrv4V5YrpjIDblnB5XDBD4LxnODPhrtZ4WPpX+a6bFx4ujmj8V8pznf0qPByJoPsBYbyWw5Kw2N8EGKwpHOkNZDS3lsPSZezvIV/TkAdSeJ2Dywy4CAZrvIUVv8i1ZWwEXLfZzl18sMhwhEKXdj/kC3eKDqfqbbG9Wf68pkWGI3E37lUBttcA7t+tcJO/qg7Glvlw7qhZrwd3qgcbzY3yeLhQbeviwCXX1UH1H02ns1nKw4WuUhcHjkon6zaxrg1snCXmEOFC6WKKA8emNZWKQ+2DZ1f+kWwbQgulRJNwbjHgYHnrVie3msoHbsGcHMU5Kev/oCT4DBYuHlwcuO+lcjj0hvmtwK2KeYA7ywB9mPfaXMHhoohAt4LWE07lhCC9NFwo4VuR7xWw4Gu4UGLyIsPR+hl31hWO+GPgLOKiFBqudLS+cJRUwEIFrYsN92V94Qgpry/cwj0njXhcoBwaP4iUXi5EVmy40dGiOekKDNcYA7SucLR5INBinvMXt6hwJBgKazG44mbViN8BvmAa6OLCJe+Bs7Y916ra3oLLDIWFcyfIThecLQsKF8XNNsh1QKP4cJTG7/Le5iw8HIE7gyWkXC0mHAw2cx09+RlOJ9/7U+j+bhIlMK5X0rz3QP6RBU5LxdgqUCnlo+y+i/IqK8MlJMu1wNvCwHW7VCUJdkejnZPU8xa03xncy4LASVeSdc5f7O5e/u/6D14T3oImrlBwyelQDFOk9uRUimqwhOoiNnhZkKig/i0MbzYfgcdznUAsMFzy3su2UZHFnSVV1C0OHOldZjp/DcSS8sHb4KIgcLBUgrQ0Go22Z9jzllLCAYMTn6lkpLHrxpBJKxrfJnF/6uzbRBXxZp2o02tjTyyl6I1w3jddotLPM8ai7MKoyvugfIVV5TuujznPlU/pX8Lh8fujyu4kYq2NJGm4NIrUjd/SytAg9D9xZzlwcs7lIpQjPJ1+/XZ2cr3Lmk2/UZJO0MpyizfGS4NzOEaqxAy/Od6CvGH1ePNlub8RaJeKXbLq7aXBqfoEKo8/QMiyOMfZ6R2AvKuDkz9baqDCDpGDVbe6y6KKo2hj5j1a9YxMCKvqJ2n783mvMUq0S9ovQZT0U1X55BHhHBsLB4lazf52fc663SebXlgML8AjFyoSli0fQsdLHY6utvpN+ESzS9wnG6oW06PSCZUN37YxtjC2OWpP6jFjysDrlyHNBxeRisrE/4SF6zBP2+fNUiwN/SOf8HPp3tenLZ6FQFgTqN3p9ekj+y2k28qXGje/5MTsebgmDjtB/MirSck1yJklPa/kvCwEElykB+Xg/p+8PKKbvCfq4/Y1sp++CCbmQJl47lWPkmZCbmo23BYkolH2MsfTKH8PUzWI5A+ziLndnc0F9xoXkZw+LS89OJrsBH6pK+eXSOXVodnFFBUmzQtHs2w8VAVYcbfbLA9WWSsYOdL9lH8fDQfjow8Ttj3yfT92VbCUranO3XUwq5DFWKOx098/9lZaB9lxHFWgUkYRqlYcT6eDs82j00kSbI9arcT1fVd/Ms3qlflBq9VsTfZPzqopEHiJRa/ml8oTJ0068qSPDSy1AndjbNPp9Pjj1snbyofyhCTN7WaQXe5Ikh+PZAfyPVWHrlkPWOfdZeXtyfh4UB2i2zJ7jmXlynryyLpvEvJS4aTptFodHLQPDs4ODw+3NjNtyS/PDs7aB4Pq12maSqfcQz/9cLGVhYSqNJPqAOvu+sO9stKd0ttXASRCQuU/XHWL55CMeeWUc1ejUtWf+lGeZMI8+6ZaTS50Ic9/KSuppWYdNfFw5073tVbv3lfVqRzl+BgyIn/Wry87LHoN4lnPetaznvWsZz3rWc961rOe9axnrVT/B9V/Y1023f87AAAAAElFTkSuQmCC"/>
-          <p:cNvSpPr>
-            <a:spLocks noChangeAspect="1" noChangeArrowheads="1"/>
-          </p:cNvSpPr>
-          <p:nvPr/>
-        </p:nvSpPr>
-        <p:spPr bwMode="auto">
-          <a:xfrm>
-            <a:off x="155575" y="-144463"/>
-            <a:ext cx="304800" cy="304801"/>
-          </a:xfrm>
-          <a:prstGeom prst="rect">
-            <a:avLst/>
-          </a:prstGeom>
-          <a:noFill/>
-        </p:spPr>
-        <p:txBody>
-          <a:bodyPr vert="horz" wrap="square" lIns="91440" tIns="45720" rIns="91440" bIns="45720" numCol="1" anchor="t" anchorCtr="0" compatLnSpc="1">
-            <a:prstTxWarp prst="textNoShape">
-              <a:avLst/>
-            </a:prstTxWarp>
-          </a:bodyPr>
-          <a:lstStyle/>
-          <a:p>
-            <a:endParaRPr lang="en-US"/>
-          </a:p>
-        </p:txBody>
-      </p:sp>
-      <p:sp>
-        <p:nvSpPr>
-          <p:cNvPr id="2052" name="AutoShape 4" descr="data:image/png;base64,iVBORw0KGgoAAAANSUhEUgAAANwAAADlCAMAAAAP8WnWAAAA9lBMVEX+/v4OdLz8/////fwPdLoNdroAc8E5fKv9/v8RdLb///3//f79//7///oAc7/5//9HiLgAbrlbmMMAabD///cQdbUJdsEAZqvP6O////MAa7cAbboAbrUAZ7Dz//+QutUAZqiy1eeUvtkAZ7YHebYAZagAdsYAaqkZcaxCjL/C5O/q//8AaaQAbsBloMhxpMmZvdMqgbxKlMJopsOTvc2109zd7vKZyODT8Ph5pcFypcxJhLlzq8PG6fG01edWjLSny+aGstFdlbmty9s/i8YNeKuArs+WuM1uqdBNk8NMibLn8fLY5/E0eKUAZ5punr9UhqrB3PD9Dq3ZAAAODUlEQVR4nO2d+1saORfHc6WTzGSGYS5yGUZQBASx0FbEtmurrrbV7vr2//9n3mS8bNu12zCgTHj8/qCCj5qPyeSck8s5ACxZgnuOEF51vD9hhESTV6/fHEw9LmzLEV4qxLL/3pPK4YKDg/L2KCGUEAhJQpJWVDmcgRAIjKxVt28hedxJr+vduK/AWMQocd1SoxS0yodDHmJ71e1bSA5Py/WIwpgSKsUY60hFEMJG//UMYGBy32F0JPtNDslsUMYxhK7ryk4k8o2k9XYKasJCtu2sup25xAc7XfiwGCP+3iESIcd41c3MqbLstwfZ1DBlpP5uJmwhbCMfvkEQs/jXcAmkrY/IMxTuxO/0u7/sOjnTlGDvDcDCuIfOsjD40/3FE/edgiMvdBCy+KobPI8sG6e937NBf++9h7FhVgHZfLajA0d7mwgLjlbd4HmEMP9j4/dsRDqdzWMPmwVnYz7bgOTh6eQ7OCqtezIVnkmTCreBGLaUK6IzND8gbtIzx7kl0gn5fdcpRfUzYRach0ElyYbdb0Xj/tCk4I4LCXeSxIRpwMXM36ytusXz6jiAkQYblAFfL1VdbdLYnLaIFhyJ4voYCKMmFYD6VAuOyni248mBaVL0I/a1HjmootntQegJk+D42I8eDnl+gpMWo/SW29wo73lQjzQCg0xuPzUrrLOvAq1hqRRvDMzqOEt0oI6HksH5mxybNF06YtfVhYPupWMUHAdvfV02SvdSo5ZpOTip68IR0qsaBrdV1zEFGRz0D1bd3rnE+cdAGy4evVl1e+eSJdpN7QmFlS4MMwXtQBsuciurbu9cmg+udLnq9s6leeBiZhgcknC6HRezbnnV7Z1L88yWMZVwZnkoW9oeCjRtWApwog8XlT6sur1ziYN9fw5TsG+YndvVDnkoHG0Ck9bUgYi0VpyVmDs64ybBzROJU7c+MOpcg/1Nfw2Fwp2hbdI+Fh83tFa/lIjb8YyCE5US09kIUXJHL81aQ/H2YqbtWzbbZsFVN+AvzqE8ANebmrW0N07kDK87LF8BbAodd2wMdqGeDaeQscZhiGxD9goU3FTnqEYGRwkMhjVkGQIHHIzeJLpwLPZfgtCciMfBXlmTDcI+3KgCxE2hs3g40DkdlYlE8B0CnjF+M8LhZ+1YjsSNLUMmyhvhYUvXxGVGzqSjGhhsJtqxHCmdApPgeNqHkXYsV2/XTPGZbeQIMC5Frq53whIPmPLM2ZYQ6d8j7VEJk8/KDpghCYfes5GvPSxbA2CMGeCcz3qEUd1QDjIBhLfqVmvKE6jiwkiTLSbuZ4GMOaGORbup22lqHT048Bxuis8cDvu682R2sWdviIAp0Q5IT33t5UpII/cUYNuYWyGHTdLXnkxoNBpzM+BsywsHWg8cYZG6akYhCarhqputJxSKmVavyXFLog513T6JhoYYcCQ8CjWW0AmTJiBgrRbsjsqmnCHlwy+JzlUCIsdkr51ODzbLG0erbrSOpBlG6Iuvtwwr+/cyFUIOyOGVJz87BY8K7LRmXepG3zSGvT88IMJQcOSp6+Srbv5/ysJ8+kLXeBMKY7h3+ulgCpRHo7Tq9v+38B/+qKMLxyTdaOQnvej6rOpxhAo8LNWaXHuP6HtdVNJFHfl8ltwk6H9uT+/MAecqbuX3v1bOpPhe6j356UfT8ZhzrW3LCcEKvTcb+qdib7uP3MWzfr1Oytcn47PjwVQqTb8LgPh3unmV0Ysw45RzmMr18Fj9btuO59WG+3X9bntIbrc72m7U682g10uU60KiyWTy56tXlf3KvV69Ui9evz7ZHJ99qw5TxLn84x54tLvmCMjJoN339RfyHhQ9P+90SHb5X/YoU1KvfN9vJORWiXwlffIkcV3X95s7/fLF2VfA5Yz7WD3nYHt41JLt0faVf9V3pa7rxnFMb5UN2ZuvSPaB3H2Hskh6pt1YOQN7/f12uvRFCsvC2PIEFuAsKlH9GOcXIrcYhLjxzavsHdf9bg3NvXvllqQok/9PtzQaBedjzxZ8iTvqiiwNQ9sblDf017keQUQCBv0BCJ0lRk2OfJhDNPjQo3o3AB9NlI66tPcRLPHBQ9IAeMeveqOkr7sU9Ehi0lyS0t6xvZiToyZcOwua1VfDrUnPb8hnhNCV9pxbop0I+uez3IchlFMg7aeDLMtypK+bHl+3GotZtqWqy9wKB16uaxcWQpYcicjJPITp2X7L73ZJf5UTyY+KWbxT5ThX5+FQYOm8c46uDk7eBUECaUQjrTubTyN1ZfsU5NwrkgNxOGuP91/s9Uh8my0JLuiULFNMxhnBrJbmmVQscNHvB0FdGU8XKusZxwVCy26G0sZhPmtgg4r+SadVqVQBOe9xVVZrqXUU76VibeFga1Zzctm6y+LDkWRQyxMeOKDsFh9u9BHkGZZGwLHReJ3hPq0z3Br3HCy9yXWcxQw4v22vLRzxq7n8LyPgWDCt5YtXXxQfjiYoFxxGL0pa+clWKXcf5EofZgRccphvcdYEOHdvir08mwZGwL1CawoXM3fjGORb3Cs8HCHxizQPmQlwUdwa5F1xLjwc9Y9y7x8XCo7EUG04x1I3m1oJIfXdFOc9bFsgODfpbdSDZrPZ6u31+ufn55PJ7u7u/lDkPklcILjkcDCofp3NhkqeksO5UAvieQ//FQcuueBhraZO5aj9Jgc5jvqa14CXO+duceD8/QdyPnseAjh3foDiwMHeyzfjT582Ly4+7+9XvnyRz9tk0mHvrmq5710UCC6GiZ/cKDv+TaDaJkwuvTDvtnGB4CSeC+9Optwf6YCjce498QLBMUgYi6Sygzh3cMTtDc2fLaHrxt+dwcnGpRTpN7bCnHviBYJ7WLRfeqEWLfPMmMWHi7rNGQC5FmULD8dI7G+pgyRrCQcZOwXWesKptk2Qg/MY8sLDKSUewms5oSg1r9YYrv4V5YrpjIDblnB5XDBD4LxnODPhrtZ4WPpX+a6bFx4ujmj8V8pznf0qPByJoPsBYbyWw5Kw2N8EGKwpHOkNZDS3lsPSZezvIV/TkAdSeJ2Dywy4CAZrvIUVv8i1ZWwEXLfZzl18sMhwhEKXdj/kC3eKDqfqbbG9Wf68pkWGI3E37lUBttcA7t+tcJO/qg7Glvlw7qhZrwd3qgcbzY3yeLhQbeviwCXX1UH1H02ns1nKw4WuUhcHjkon6zaxrg1snCXmEOFC6WKKA8emNZWKQ+2DZ1f+kWwbQgulRJNwbjHgYHnrVie3msoHbsGcHMU5Kev/oCT4DBYuHlwcuO+lcjj0hvmtwK2KeYA7ywB9mPfaXMHhoohAt4LWE07lhCC9NFwo4VuR7xWw4Gu4UGLyIsPR+hl31hWO+GPgLOKiFBqudLS+cJRUwEIFrYsN92V94Qgpry/cwj0njXhcoBwaP4iUXi5EVmy40dGiOekKDNcYA7SucLR5INBinvMXt6hwJBgKazG44mbViN8BvmAa6OLCJe+Bs7Y916ra3oLLDIWFcyfIThecLQsKF8XNNsh1QKP4cJTG7/Le5iw8HIE7gyWkXC0mHAw2cx09+RlOJ9/7U+j+bhIlMK5X0rz3QP6RBU5LxdgqUCnlo+y+i/IqK8MlJMu1wNvCwHW7VCUJdkejnZPU8xa03xncy4LASVeSdc5f7O5e/u/6D14T3oImrlBwyelQDFOk9uRUimqwhOoiNnhZkKig/i0MbzYfgcdznUAsMFzy3su2UZHFnSVV1C0OHOldZjp/DcSS8sHb4KIgcLBUgrQ0Go22Z9jzllLCAYMTn6lkpLHrxpBJKxrfJnF/6uzbRBXxZp2o02tjTyyl6I1w3jddotLPM8ai7MKoyvugfIVV5TuujznPlU/pX8Lh8fujyu4kYq2NJGm4NIrUjd/SytAg9D9xZzlwcs7lIpQjPJ1+/XZ2cr3Lmk2/UZJO0MpyizfGS4NzOEaqxAy/Od6CvGH1ePNlub8RaJeKXbLq7aXBqfoEKo8/QMiyOMfZ6R2AvKuDkz9baqDCDpGDVbe6y6KKo2hj5j1a9YxMCKvqJ2n783mvMUq0S9ovQZT0U1X55BHhHBsLB4lazf52fc663SebXlgML8AjFyoSli0fQsdLHY6utvpN+ESzS9wnG6oW06PSCZUN37YxtjC2OWpP6jFjysDrlyHNBxeRisrE/4SF6zBP2+fNUiwN/SOf8HPp3tenLZ6FQFgTqN3p9ekj+y2k28qXGje/5MTsebgmDjtB/MirSck1yJklPa/kvCwEElykB+Xg/p+8PKKbvCfq4/Y1sp++CCbmQJl47lWPkmZCbmo23BYkolH2MsfTKH8PUzWI5A+ziLndnc0F9xoXkZw+LS89OJrsBH6pK+eXSOXVodnFFBUmzQtHs2w8VAVYcbfbLA9WWSsYOdL9lH8fDQfjow8Ttj3yfT92VbCUranO3XUwq5DFWKOx098/9lZaB9lxHFWgUkYRqlYcT6eDs82j00kSbI9arcT1fVd/Ms3qlflBq9VsTfZPzqopEHiJRa/ml8oTJ0068qSPDSy1AndjbNPp9Pjj1snbyofyhCTN7WaQXe5Ikh+PZAfyPVWHrlkPWOfdZeXtyfh4UB2i2zJ7jmXlynryyLpvEvJS4aTptFodHLQPDs4ODw+3NjNtyS/PDs7aB4Pq12maSqfcQz/9cLGVhYSqNJPqAOvu+sO9stKd0ttXASRCQuU/XHWL55CMeeWUc1ejUtWf+lGeZMI8+6ZaTS50Ic9/KSuppWYdNfFw5073tVbv3lfVqRzl+BgyIn/Wry87LHoN4lnPetaznvWsZz3rWc961rOe9axnrVT/B9V/Y1023f87AAAAAElFTkSuQmCC"/>
-          <p:cNvSpPr>
-            <a:spLocks noChangeAspect="1" noChangeArrowheads="1"/>
-          </p:cNvSpPr>
-          <p:nvPr/>
-        </p:nvSpPr>
-        <p:spPr bwMode="auto">
-          <a:xfrm>
-            <a:off x="155575" y="-144463"/>
-            <a:ext cx="304800" cy="304801"/>
-          </a:xfrm>
-          <a:prstGeom prst="rect">
-            <a:avLst/>
-          </a:prstGeom>
-          <a:noFill/>
-        </p:spPr>
-        <p:txBody>
-          <a:bodyPr vert="horz" wrap="square" lIns="91440" tIns="45720" rIns="91440" bIns="45720" numCol="1" anchor="t" anchorCtr="0" compatLnSpc="1">
-            <a:prstTxWarp prst="textNoShape">
-              <a:avLst/>
-            </a:prstTxWarp>
-          </a:bodyPr>
-          <a:lstStyle/>
-          <a:p>
-            <a:endParaRPr lang="en-US"/>
-          </a:p>
-        </p:txBody>
-      </p:sp>
-    </p:spTree>
-  </p:cSld>
-  <p:clrMapOvr>
-    <a:masterClrMapping/>
-  </p:clrMapOvr>
-</p:sld>
-</file>
-
 <file path=ppt/slides/slide5.xml><?xml version="1.0" encoding="utf-8"?>
 <p:sld xmlns:a="http://schemas.openxmlformats.org/drawingml/2006/main" xmlns:r="http://schemas.openxmlformats.org/officeDocument/2006/relationships" xmlns:p="http://schemas.openxmlformats.org/presentationml/2006/main">
   <p:cSld>
@@ -11678,6 +11458,285 @@
 </file>
 
 <file path=ppt/slides/slide50.xml><?xml version="1.0" encoding="utf-8"?>
+<p:sld xmlns:a="http://schemas.openxmlformats.org/drawingml/2006/main" xmlns:r="http://schemas.openxmlformats.org/officeDocument/2006/relationships" xmlns:p="http://schemas.openxmlformats.org/presentationml/2006/main">
+  <p:cSld>
+    <p:spTree>
+      <p:nvGrpSpPr>
+        <p:cNvPr id="1" name=""/>
+        <p:cNvGrpSpPr/>
+        <p:nvPr/>
+      </p:nvGrpSpPr>
+      <p:grpSpPr>
+        <a:xfrm>
+          <a:off x="0" y="0"/>
+          <a:ext cx="0" cy="0"/>
+          <a:chOff x="0" y="0"/>
+          <a:chExt cx="0" cy="0"/>
+        </a:xfrm>
+      </p:grpSpPr>
+      <p:sp>
+        <p:nvSpPr>
+          <p:cNvPr id="3" name="Content Placeholder 2"/>
+          <p:cNvSpPr>
+            <a:spLocks noGrp="1"/>
+          </p:cNvSpPr>
+          <p:nvPr>
+            <p:ph idx="1"/>
+          </p:nvPr>
+        </p:nvSpPr>
+        <p:spPr/>
+        <p:txBody>
+          <a:bodyPr/>
+          <a:lstStyle/>
+          <a:p>
+            <a:r>
+              <a:rPr lang="en-US" sz="2400" i="1" dirty="0" smtClean="0">
+                <a:solidFill>
+                  <a:srgbClr val="C00000"/>
+                </a:solidFill>
+              </a:rPr>
+              <a:t>Development time</a:t>
+            </a:r>
+            <a:r>
+              <a:rPr lang="en-US" sz="2400" dirty="0" smtClean="0"/>
+              <a:t> reduction</a:t>
+            </a:r>
+          </a:p>
+          <a:p>
+            <a:pPr lvl="1"/>
+            <a:r>
+              <a:rPr lang="en-US" sz="2000" dirty="0" smtClean="0"/>
+              <a:t>Implementable (business cases support).</a:t>
+            </a:r>
+          </a:p>
+          <a:p>
+            <a:pPr lvl="1"/>
+            <a:r>
+              <a:rPr lang="en-US" sz="2000" dirty="0" smtClean="0"/>
+              <a:t>Understandability</a:t>
+            </a:r>
+          </a:p>
+          <a:p>
+            <a:pPr lvl="2"/>
+            <a:r>
+              <a:rPr lang="en-US" sz="1600" dirty="0" smtClean="0"/>
+              <a:t>Screaming (expressing its core business purpose)</a:t>
+            </a:r>
+          </a:p>
+          <a:p>
+            <a:pPr lvl="1"/>
+            <a:r>
+              <a:rPr lang="en-US" sz="2000" dirty="0" smtClean="0"/>
+              <a:t>Modular.</a:t>
+            </a:r>
+          </a:p>
+          <a:p>
+            <a:pPr lvl="2"/>
+            <a:r>
+              <a:rPr lang="en-US" sz="1600" dirty="0" smtClean="0"/>
+              <a:t>Independent UI. The UI can change easily.</a:t>
+            </a:r>
+          </a:p>
+          <a:p>
+            <a:pPr lvl="2"/>
+            <a:r>
+              <a:rPr lang="en-US" sz="1600" dirty="0" smtClean="0"/>
+              <a:t>Independent of any external agency.</a:t>
+            </a:r>
+          </a:p>
+          <a:p>
+            <a:pPr lvl="2"/>
+            <a:r>
+              <a:rPr lang="en-US" sz="1600" dirty="0" smtClean="0"/>
+              <a:t>Independent of the database and frameworks.</a:t>
+            </a:r>
+          </a:p>
+          <a:p>
+            <a:pPr lvl="2"/>
+            <a:r>
+              <a:rPr lang="en-US" sz="1600" dirty="0" smtClean="0"/>
+              <a:t>The business rules can be tested without the UI, </a:t>
+            </a:r>
+          </a:p>
+          <a:p>
+            <a:pPr lvl="2">
+              <a:buNone/>
+            </a:pPr>
+            <a:r>
+              <a:rPr lang="en-US" sz="1600" dirty="0" smtClean="0"/>
+              <a:t>	database, web server, or any other external element.</a:t>
+            </a:r>
+          </a:p>
+          <a:p>
+            <a:r>
+              <a:rPr lang="en-US" sz="2400" i="1" dirty="0" smtClean="0">
+                <a:solidFill>
+                  <a:srgbClr val="C00000"/>
+                </a:solidFill>
+              </a:rPr>
+              <a:t>Deployment time</a:t>
+            </a:r>
+            <a:r>
+              <a:rPr lang="en-US" sz="2400" dirty="0" smtClean="0"/>
+              <a:t> reduction</a:t>
+            </a:r>
+          </a:p>
+          <a:p>
+            <a:pPr lvl="1"/>
+            <a:r>
+              <a:rPr lang="en-US" sz="2000" dirty="0" smtClean="0"/>
+              <a:t>Units of deployment (DLLs, JARs, PHP files, gem files) are </a:t>
+            </a:r>
+            <a:r>
+              <a:rPr lang="en-US" sz="2000" u="sng" dirty="0" smtClean="0"/>
+              <a:t>few</a:t>
+            </a:r>
+            <a:r>
+              <a:rPr lang="en-US" sz="2000" dirty="0" smtClean="0"/>
+              <a:t>.</a:t>
+            </a:r>
+          </a:p>
+          <a:p>
+            <a:pPr lvl="1"/>
+            <a:r>
+              <a:rPr lang="en-US" sz="2000" dirty="0" smtClean="0"/>
+              <a:t>Deployed with a </a:t>
+            </a:r>
+            <a:r>
+              <a:rPr lang="en-US" sz="2000" u="sng" dirty="0" smtClean="0"/>
+              <a:t>single action</a:t>
+            </a:r>
+            <a:r>
+              <a:rPr lang="en-US" sz="2000" dirty="0" smtClean="0"/>
+              <a:t>.</a:t>
+            </a:r>
+          </a:p>
+        </p:txBody>
+      </p:sp>
+      <p:pic>
+        <p:nvPicPr>
+          <p:cNvPr id="2055" name="Picture 7"/>
+          <p:cNvPicPr>
+            <a:picLocks noChangeAspect="1" noChangeArrowheads="1"/>
+          </p:cNvPicPr>
+          <p:nvPr/>
+        </p:nvPicPr>
+        <p:blipFill>
+          <a:blip r:embed="rId2" cstate="print"/>
+          <a:srcRect/>
+          <a:stretch>
+            <a:fillRect/>
+          </a:stretch>
+        </p:blipFill>
+        <p:spPr bwMode="auto">
+          <a:xfrm>
+            <a:off x="6172200" y="2034540"/>
+            <a:ext cx="2369820" cy="2232660"/>
+          </a:xfrm>
+          <a:prstGeom prst="rect">
+            <a:avLst/>
+          </a:prstGeom>
+          <a:noFill/>
+          <a:ln w="9525">
+            <a:noFill/>
+            <a:miter lim="800000"/>
+            <a:headEnd/>
+            <a:tailEnd/>
+          </a:ln>
+        </p:spPr>
+      </p:pic>
+      <p:sp>
+        <p:nvSpPr>
+          <p:cNvPr id="2" name="Title 1"/>
+          <p:cNvSpPr>
+            <a:spLocks noGrp="1"/>
+          </p:cNvSpPr>
+          <p:nvPr>
+            <p:ph type="title"/>
+          </p:nvPr>
+        </p:nvSpPr>
+        <p:spPr/>
+        <p:txBody>
+          <a:bodyPr/>
+          <a:lstStyle/>
+          <a:p>
+            <a:r>
+              <a:rPr lang="en-US" dirty="0" smtClean="0"/>
+              <a:t>“Good” Architecture (I)</a:t>
+            </a:r>
+            <a:endParaRPr lang="en-US" dirty="0"/>
+          </a:p>
+        </p:txBody>
+      </p:sp>
+      <p:sp>
+        <p:nvSpPr>
+          <p:cNvPr id="2050" name="AutoShape 2" descr="data:image/png;base64,iVBORw0KGgoAAAANSUhEUgAAANwAAADlCAMAAAAP8WnWAAAA9lBMVEX+/v4OdLz8/////fwPdLoNdroAc8E5fKv9/v8RdLb///3//f79//7///oAc7/5//9HiLgAbrlbmMMAabD///cQdbUJdsEAZqvP6O////MAa7cAbboAbrUAZ7Dz//+QutUAZqiy1eeUvtkAZ7YHebYAZagAdsYAaqkZcaxCjL/C5O/q//8AaaQAbsBloMhxpMmZvdMqgbxKlMJopsOTvc2109zd7vKZyODT8Ph5pcFypcxJhLlzq8PG6fG01edWjLSny+aGstFdlbmty9s/i8YNeKuArs+WuM1uqdBNk8NMibLn8fLY5/E0eKUAZ5punr9UhqrB3PD9Dq3ZAAAODUlEQVR4nO2d+1saORfHc6WTzGSGYS5yGUZQBASx0FbEtmurrrbV7vr2//9n3mS8bNu12zCgTHj8/qCCj5qPyeSck8s5ACxZgnuOEF51vD9hhESTV6/fHEw9LmzLEV4qxLL/3pPK4YKDg/L2KCGUEAhJQpJWVDmcgRAIjKxVt28hedxJr+vduK/AWMQocd1SoxS0yodDHmJ71e1bSA5Py/WIwpgSKsUY60hFEMJG//UMYGBy32F0JPtNDslsUMYxhK7ryk4k8o2k9XYKasJCtu2sup25xAc7XfiwGCP+3iESIcd41c3MqbLstwfZ1DBlpP5uJmwhbCMfvkEQs/jXcAmkrY/IMxTuxO/0u7/sOjnTlGDvDcDCuIfOsjD40/3FE/edgiMvdBCy+KobPI8sG6e937NBf++9h7FhVgHZfLajA0d7mwgLjlbd4HmEMP9j4/dsRDqdzWMPmwVnYz7bgOTh6eQ7OCqtezIVnkmTCreBGLaUK6IzND8gbtIzx7kl0gn5fdcpRfUzYRach0ElyYbdb0Xj/tCk4I4LCXeSxIRpwMXM36ytusXz6jiAkQYblAFfL1VdbdLYnLaIFhyJ4voYCKMmFYD6VAuOyni248mBaVL0I/a1HjmootntQegJk+D42I8eDnl+gpMWo/SW29wo73lQjzQCg0xuPzUrrLOvAq1hqRRvDMzqOEt0oI6HksH5mxybNF06YtfVhYPupWMUHAdvfV02SvdSo5ZpOTip68IR0qsaBrdV1zEFGRz0D1bd3rnE+cdAGy4evVl1e+eSJdpN7QmFlS4MMwXtQBsuciurbu9cmg+udLnq9s6leeBiZhgcknC6HRezbnnV7Z1L88yWMZVwZnkoW9oeCjRtWApwog8XlT6sur1ziYN9fw5TsG+YndvVDnkoHG0Ck9bUgYi0VpyVmDs64ybBzROJU7c+MOpcg/1Nfw2Fwp2hbdI+Fh83tFa/lIjb8YyCE5US09kIUXJHL81aQ/H2YqbtWzbbZsFVN+AvzqE8ANebmrW0N07kDK87LF8BbAodd2wMdqGeDaeQscZhiGxD9goU3FTnqEYGRwkMhjVkGQIHHIzeJLpwLPZfgtCciMfBXlmTDcI+3KgCxE2hs3g40DkdlYlE8B0CnjF+M8LhZ+1YjsSNLUMmyhvhYUvXxGVGzqSjGhhsJtqxHCmdApPgeNqHkXYsV2/XTPGZbeQIMC5Frq53whIPmPLM2ZYQ6d8j7VEJk8/KDpghCYfes5GvPSxbA2CMGeCcz3qEUd1QDjIBhLfqVmvKE6jiwkiTLSbuZ4GMOaGORbup22lqHT048Bxuis8cDvu682R2sWdviIAp0Q5IT33t5UpII/cUYNuYWyGHTdLXnkxoNBpzM+BsywsHWg8cYZG6akYhCarhqputJxSKmVavyXFLog513T6JhoYYcCQ8CjWW0AmTJiBgrRbsjsqmnCHlwy+JzlUCIsdkr51ODzbLG0erbrSOpBlG6Iuvtwwr+/cyFUIOyOGVJz87BY8K7LRmXepG3zSGvT88IMJQcOSp6+Srbv5/ysJ8+kLXeBMKY7h3+ulgCpRHo7Tq9v+38B/+qKMLxyTdaOQnvej6rOpxhAo8LNWaXHuP6HtdVNJFHfl8ltwk6H9uT+/MAecqbuX3v1bOpPhe6j356UfT8ZhzrW3LCcEKvTcb+qdib7uP3MWzfr1Oytcn47PjwVQqTb8LgPh3unmV0Ysw45RzmMr18Fj9btuO59WG+3X9bntIbrc72m7U682g10uU60KiyWTy56tXlf3KvV69Ui9evz7ZHJ99qw5TxLn84x54tLvmCMjJoN339RfyHhQ9P+90SHb5X/YoU1KvfN9vJORWiXwlffIkcV3X95s7/fLF2VfA5Yz7WD3nYHt41JLt0faVf9V3pa7rxnFMb5UN2ZuvSPaB3H2Hskh6pt1YOQN7/f12uvRFCsvC2PIEFuAsKlH9GOcXIrcYhLjxzavsHdf9bg3NvXvllqQok/9PtzQaBedjzxZ8iTvqiiwNQ9sblDf017keQUQCBv0BCJ0lRk2OfJhDNPjQo3o3AB9NlI66tPcRLPHBQ9IAeMeveqOkr7sU9Ehi0lyS0t6xvZiToyZcOwua1VfDrUnPb8hnhNCV9pxbop0I+uez3IchlFMg7aeDLMtypK+bHl+3GotZtqWqy9wKB16uaxcWQpYcicjJPITp2X7L73ZJf5UTyY+KWbxT5ThX5+FQYOm8c46uDk7eBUECaUQjrTubTyN1ZfsU5NwrkgNxOGuP91/s9Uh8my0JLuiULFNMxhnBrJbmmVQscNHvB0FdGU8XKusZxwVCy26G0sZhPmtgg4r+SadVqVQBOe9xVVZrqXUU76VibeFga1Zzctm6y+LDkWRQyxMeOKDsFh9u9BHkGZZGwLHReJ3hPq0z3Br3HCy9yXWcxQw4v22vLRzxq7n8LyPgWDCt5YtXXxQfjiYoFxxGL0pa+clWKXcf5EofZgRccphvcdYEOHdvir08mwZGwL1CawoXM3fjGORb3Cs8HCHxizQPmQlwUdwa5F1xLjwc9Y9y7x8XCo7EUG04x1I3m1oJIfXdFOc9bFsgODfpbdSDZrPZ6u31+ufn55PJ7u7u/lDkPklcILjkcDCofp3NhkqeksO5UAvieQ//FQcuueBhraZO5aj9Jgc5jvqa14CXO+duceD8/QdyPnseAjh3foDiwMHeyzfjT582Ly4+7+9XvnyRz9tk0mHvrmq5710UCC6GiZ/cKDv+TaDaJkwuvTDvtnGB4CSeC+9Optwf6YCjce498QLBMUgYi6Sygzh3cMTtDc2fLaHrxt+dwcnGpRTpN7bCnHviBYJ7WLRfeqEWLfPMmMWHi7rNGQC5FmULD8dI7G+pgyRrCQcZOwXWesKptk2Qg/MY8sLDKSUewms5oSg1r9YYrv4V5YrpjIDblnB5XDBD4LxnODPhrtZ4WPpX+a6bFx4ujmj8V8pznf0qPByJoPsBYbyWw5Kw2N8EGKwpHOkNZDS3lsPSZezvIV/TkAdSeJ2Dywy4CAZrvIUVv8i1ZWwEXLfZzl18sMhwhEKXdj/kC3eKDqfqbbG9Wf68pkWGI3E37lUBttcA7t+tcJO/qg7Glvlw7qhZrwd3qgcbzY3yeLhQbeviwCXX1UH1H02ns1nKw4WuUhcHjkon6zaxrg1snCXmEOFC6WKKA8emNZWKQ+2DZ1f+kWwbQgulRJNwbjHgYHnrVie3msoHbsGcHMU5Kev/oCT4DBYuHlwcuO+lcjj0hvmtwK2KeYA7ywB9mPfaXMHhoohAt4LWE07lhCC9NFwo4VuR7xWw4Gu4UGLyIsPR+hl31hWO+GPgLOKiFBqudLS+cJRUwEIFrYsN92V94Qgpry/cwj0njXhcoBwaP4iUXi5EVmy40dGiOekKDNcYA7SucLR5INBinvMXt6hwJBgKazG44mbViN8BvmAa6OLCJe+Bs7Y916ra3oLLDIWFcyfIThecLQsKF8XNNsh1QKP4cJTG7/Le5iw8HIE7gyWkXC0mHAw2cx09+RlOJ9/7U+j+bhIlMK5X0rz3QP6RBU5LxdgqUCnlo+y+i/IqK8MlJMu1wNvCwHW7VCUJdkejnZPU8xa03xncy4LASVeSdc5f7O5e/u/6D14T3oImrlBwyelQDFOk9uRUimqwhOoiNnhZkKig/i0MbzYfgcdznUAsMFzy3su2UZHFnSVV1C0OHOldZjp/DcSS8sHb4KIgcLBUgrQ0Go22Z9jzllLCAYMTn6lkpLHrxpBJKxrfJnF/6uzbRBXxZp2o02tjTyyl6I1w3jddotLPM8ai7MKoyvugfIVV5TuujznPlU/pX8Lh8fujyu4kYq2NJGm4NIrUjd/SytAg9D9xZzlwcs7lIpQjPJ1+/XZ2cr3Lmk2/UZJO0MpyizfGS4NzOEaqxAy/Od6CvGH1ePNlub8RaJeKXbLq7aXBqfoEKo8/QMiyOMfZ6R2AvKuDkz9baqDCDpGDVbe6y6KKo2hj5j1a9YxMCKvqJ2n783mvMUq0S9ovQZT0U1X55BHhHBsLB4lazf52fc663SebXlgML8AjFyoSli0fQsdLHY6utvpN+ESzS9wnG6oW06PSCZUN37YxtjC2OWpP6jFjysDrlyHNBxeRisrE/4SF6zBP2+fNUiwN/SOf8HPp3tenLZ6FQFgTqN3p9ekj+y2k28qXGje/5MTsebgmDjtB/MirSck1yJklPa/kvCwEElykB+Xg/p+8PKKbvCfq4/Y1sp++CCbmQJl47lWPkmZCbmo23BYkolH2MsfTKH8PUzWI5A+ziLndnc0F9xoXkZw+LS89OJrsBH6pK+eXSOXVodnFFBUmzQtHs2w8VAVYcbfbLA9WWSsYOdL9lH8fDQfjow8Ttj3yfT92VbCUranO3XUwq5DFWKOx098/9lZaB9lxHFWgUkYRqlYcT6eDs82j00kSbI9arcT1fVd/Ms3qlflBq9VsTfZPzqopEHiJRa/ml8oTJ0068qSPDSy1AndjbNPp9Pjj1snbyofyhCTN7WaQXe5Ikh+PZAfyPVWHrlkPWOfdZeXtyfh4UB2i2zJ7jmXlynryyLpvEvJS4aTptFodHLQPDs4ODw+3NjNtyS/PDs7aB4Pq12maSqfcQz/9cLGVhYSqNJPqAOvu+sO9stKd0ttXASRCQuU/XHWL55CMeeWUc1ejUtWf+lGeZMI8+6ZaTS50Ic9/KSuppWYdNfFw5073tVbv3lfVqRzl+BgyIn/Wry87LHoN4lnPetaznvWsZz3rWc961rOe9axnrVT/B9V/Y1023f87AAAAAElFTkSuQmCC"/>
+          <p:cNvSpPr>
+            <a:spLocks noChangeAspect="1" noChangeArrowheads="1"/>
+          </p:cNvSpPr>
+          <p:nvPr/>
+        </p:nvSpPr>
+        <p:spPr bwMode="auto">
+          <a:xfrm>
+            <a:off x="155575" y="-144463"/>
+            <a:ext cx="304800" cy="304801"/>
+          </a:xfrm>
+          <a:prstGeom prst="rect">
+            <a:avLst/>
+          </a:prstGeom>
+          <a:noFill/>
+        </p:spPr>
+        <p:txBody>
+          <a:bodyPr vert="horz" wrap="square" lIns="91440" tIns="45720" rIns="91440" bIns="45720" numCol="1" anchor="t" anchorCtr="0" compatLnSpc="1">
+            <a:prstTxWarp prst="textNoShape">
+              <a:avLst/>
+            </a:prstTxWarp>
+          </a:bodyPr>
+          <a:lstStyle/>
+          <a:p>
+            <a:endParaRPr lang="en-US"/>
+          </a:p>
+        </p:txBody>
+      </p:sp>
+      <p:sp>
+        <p:nvSpPr>
+          <p:cNvPr id="2052" name="AutoShape 4" descr="data:image/png;base64,iVBORw0KGgoAAAANSUhEUgAAANwAAADlCAMAAAAP8WnWAAAA9lBMVEX+/v4OdLz8/////fwPdLoNdroAc8E5fKv9/v8RdLb///3//f79//7///oAc7/5//9HiLgAbrlbmMMAabD///cQdbUJdsEAZqvP6O////MAa7cAbboAbrUAZ7Dz//+QutUAZqiy1eeUvtkAZ7YHebYAZagAdsYAaqkZcaxCjL/C5O/q//8AaaQAbsBloMhxpMmZvdMqgbxKlMJopsOTvc2109zd7vKZyODT8Ph5pcFypcxJhLlzq8PG6fG01edWjLSny+aGstFdlbmty9s/i8YNeKuArs+WuM1uqdBNk8NMibLn8fLY5/E0eKUAZ5punr9UhqrB3PD9Dq3ZAAAODUlEQVR4nO2d+1saORfHc6WTzGSGYS5yGUZQBASx0FbEtmurrrbV7vr2//9n3mS8bNu12zCgTHj8/qCCj5qPyeSck8s5ACxZgnuOEF51vD9hhESTV6/fHEw9LmzLEV4qxLL/3pPK4YKDg/L2KCGUEAhJQpJWVDmcgRAIjKxVt28hedxJr+vduK/AWMQocd1SoxS0yodDHmJ71e1bSA5Py/WIwpgSKsUY60hFEMJG//UMYGBy32F0JPtNDslsUMYxhK7ryk4k8o2k9XYKasJCtu2sup25xAc7XfiwGCP+3iESIcd41c3MqbLstwfZ1DBlpP5uJmwhbCMfvkEQs/jXcAmkrY/IMxTuxO/0u7/sOjnTlGDvDcDCuIfOsjD40/3FE/edgiMvdBCy+KobPI8sG6e937NBf++9h7FhVgHZfLajA0d7mwgLjlbd4HmEMP9j4/dsRDqdzWMPmwVnYz7bgOTh6eQ7OCqtezIVnkmTCreBGLaUK6IzND8gbtIzx7kl0gn5fdcpRfUzYRach0ElyYbdb0Xj/tCk4I4LCXeSxIRpwMXM36ytusXz6jiAkQYblAFfL1VdbdLYnLaIFhyJ4voYCKMmFYD6VAuOyni248mBaVL0I/a1HjmootntQegJk+D42I8eDnl+gpMWo/SW29wo73lQjzQCg0xuPzUrrLOvAq1hqRRvDMzqOEt0oI6HksH5mxybNF06YtfVhYPupWMUHAdvfV02SvdSo5ZpOTip68IR0qsaBrdV1zEFGRz0D1bd3rnE+cdAGy4evVl1e+eSJdpN7QmFlS4MMwXtQBsuciurbu9cmg+udLnq9s6leeBiZhgcknC6HRezbnnV7Z1L88yWMZVwZnkoW9oeCjRtWApwog8XlT6sur1ziYN9fw5TsG+YndvVDnkoHG0Ck9bUgYi0VpyVmDs64ybBzROJU7c+MOpcg/1Nfw2Fwp2hbdI+Fh83tFa/lIjb8YyCE5US09kIUXJHL81aQ/H2YqbtWzbbZsFVN+AvzqE8ANebmrW0N07kDK87LF8BbAodd2wMdqGeDaeQscZhiGxD9goU3FTnqEYGRwkMhjVkGQIHHIzeJLpwLPZfgtCciMfBXlmTDcI+3KgCxE2hs3g40DkdlYlE8B0CnjF+M8LhZ+1YjsSNLUMmyhvhYUvXxGVGzqSjGhhsJtqxHCmdApPgeNqHkXYsV2/XTPGZbeQIMC5Frq53whIPmPLM2ZYQ6d8j7VEJk8/KDpghCYfes5GvPSxbA2CMGeCcz3qEUd1QDjIBhLfqVmvKE6jiwkiTLSbuZ4GMOaGORbup22lqHT048Bxuis8cDvu682R2sWdviIAp0Q5IT33t5UpII/cUYNuYWyGHTdLXnkxoNBpzM+BsywsHWg8cYZG6akYhCarhqputJxSKmVavyXFLog513T6JhoYYcCQ8CjWW0AmTJiBgrRbsjsqmnCHlwy+JzlUCIsdkr51ODzbLG0erbrSOpBlG6Iuvtwwr+/cyFUIOyOGVJz87BY8K7LRmXepG3zSGvT88IMJQcOSp6+Srbv5/ysJ8+kLXeBMKY7h3+ulgCpRHo7Tq9v+38B/+qKMLxyTdaOQnvej6rOpxhAo8LNWaXHuP6HtdVNJFHfl8ltwk6H9uT+/MAecqbuX3v1bOpPhe6j356UfT8ZhzrW3LCcEKvTcb+qdib7uP3MWzfr1Oytcn47PjwVQqTb8LgPh3unmV0Ysw45RzmMr18Fj9btuO59WG+3X9bntIbrc72m7U682g10uU60KiyWTy56tXlf3KvV69Ui9evz7ZHJ99qw5TxLn84x54tLvmCMjJoN339RfyHhQ9P+90SHb5X/YoU1KvfN9vJORWiXwlffIkcV3X95s7/fLF2VfA5Yz7WD3nYHt41JLt0faVf9V3pa7rxnFMb5UN2ZuvSPaB3H2Hskh6pt1YOQN7/f12uvRFCsvC2PIEFuAsKlH9GOcXIrcYhLjxzavsHdf9bg3NvXvllqQok/9PtzQaBedjzxZ8iTvqiiwNQ9sblDf017keQUQCBv0BCJ0lRk2OfJhDNPjQo3o3AB9NlI66tPcRLPHBQ9IAeMeveqOkr7sU9Ehi0lyS0t6xvZiToyZcOwua1VfDrUnPb8hnhNCV9pxbop0I+uez3IchlFMg7aeDLMtypK+bHl+3GotZtqWqy9wKB16uaxcWQpYcicjJPITp2X7L73ZJf5UTyY+KWbxT5ThX5+FQYOm8c46uDk7eBUECaUQjrTubTyN1ZfsU5NwrkgNxOGuP91/s9Uh8my0JLuiULFNMxhnBrJbmmVQscNHvB0FdGU8XKusZxwVCy26G0sZhPmtgg4r+SadVqVQBOe9xVVZrqXUU76VibeFga1Zzctm6y+LDkWRQyxMeOKDsFh9u9BHkGZZGwLHReJ3hPq0z3Br3HCy9yXWcxQw4v22vLRzxq7n8LyPgWDCt5YtXXxQfjiYoFxxGL0pa+clWKXcf5EofZgRccphvcdYEOHdvir08mwZGwL1CawoXM3fjGORb3Cs8HCHxizQPmQlwUdwa5F1xLjwc9Y9y7x8XCo7EUG04x1I3m1oJIfXdFOc9bFsgODfpbdSDZrPZ6u31+ufn55PJ7u7u/lDkPklcILjkcDCofp3NhkqeksO5UAvieQ//FQcuueBhraZO5aj9Jgc5jvqa14CXO+duceD8/QdyPnseAjh3foDiwMHeyzfjT582Ly4+7+9XvnyRz9tk0mHvrmq5710UCC6GiZ/cKDv+TaDaJkwuvTDvtnGB4CSeC+9Optwf6YCjce498QLBMUgYi6Sygzh3cMTtDc2fLaHrxt+dwcnGpRTpN7bCnHviBYJ7WLRfeqEWLfPMmMWHi7rNGQC5FmULD8dI7G+pgyRrCQcZOwXWesKptk2Qg/MY8sLDKSUewms5oSg1r9YYrv4V5YrpjIDblnB5XDBD4LxnODPhrtZ4WPpX+a6bFx4ujmj8V8pznf0qPByJoPsBYbyWw5Kw2N8EGKwpHOkNZDS3lsPSZezvIV/TkAdSeJ2Dywy4CAZrvIUVv8i1ZWwEXLfZzl18sMhwhEKXdj/kC3eKDqfqbbG9Wf68pkWGI3E37lUBttcA7t+tcJO/qg7Glvlw7qhZrwd3qgcbzY3yeLhQbeviwCXX1UH1H02ns1nKw4WuUhcHjkon6zaxrg1snCXmEOFC6WKKA8emNZWKQ+2DZ1f+kWwbQgulRJNwbjHgYHnrVie3msoHbsGcHMU5Kev/oCT4DBYuHlwcuO+lcjj0hvmtwK2KeYA7ywB9mPfaXMHhoohAt4LWE07lhCC9NFwo4VuR7xWw4Gu4UGLyIsPR+hl31hWO+GPgLOKiFBqudLS+cJRUwEIFrYsN92V94Qgpry/cwj0njXhcoBwaP4iUXi5EVmy40dGiOekKDNcYA7SucLR5INBinvMXt6hwJBgKazG44mbViN8BvmAa6OLCJe+Bs7Y916ra3oLLDIWFcyfIThecLQsKF8XNNsh1QKP4cJTG7/Le5iw8HIE7gyWkXC0mHAw2cx09+RlOJ9/7U+j+bhIlMK5X0rz3QP6RBU5LxdgqUCnlo+y+i/IqK8MlJMu1wNvCwHW7VCUJdkejnZPU8xa03xncy4LASVeSdc5f7O5e/u/6D14T3oImrlBwyelQDFOk9uRUimqwhOoiNnhZkKig/i0MbzYfgcdznUAsMFzy3su2UZHFnSVV1C0OHOldZjp/DcSS8sHb4KIgcLBUgrQ0Go22Z9jzllLCAYMTn6lkpLHrxpBJKxrfJnF/6uzbRBXxZp2o02tjTyyl6I1w3jddotLPM8ai7MKoyvugfIVV5TuujznPlU/pX8Lh8fujyu4kYq2NJGm4NIrUjd/SytAg9D9xZzlwcs7lIpQjPJ1+/XZ2cr3Lmk2/UZJO0MpyizfGS4NzOEaqxAy/Od6CvGH1ePNlub8RaJeKXbLq7aXBqfoEKo8/QMiyOMfZ6R2AvKuDkz9baqDCDpGDVbe6y6KKo2hj5j1a9YxMCKvqJ2n783mvMUq0S9ovQZT0U1X55BHhHBsLB4lazf52fc663SebXlgML8AjFyoSli0fQsdLHY6utvpN+ESzS9wnG6oW06PSCZUN37YxtjC2OWpP6jFjysDrlyHNBxeRisrE/4SF6zBP2+fNUiwN/SOf8HPp3tenLZ6FQFgTqN3p9ekj+y2k28qXGje/5MTsebgmDjtB/MirSck1yJklPa/kvCwEElykB+Xg/p+8PKKbvCfq4/Y1sp++CCbmQJl47lWPkmZCbmo23BYkolH2MsfTKH8PUzWI5A+ziLndnc0F9xoXkZw+LS89OJrsBH6pK+eXSOXVodnFFBUmzQtHs2w8VAVYcbfbLA9WWSsYOdL9lH8fDQfjow8Ttj3yfT92VbCUranO3XUwq5DFWKOx098/9lZaB9lxHFWgUkYRqlYcT6eDs82j00kSbI9arcT1fVd/Ms3qlflBq9VsTfZPzqopEHiJRa/ml8oTJ0068qSPDSy1AndjbNPp9Pjj1snbyofyhCTN7WaQXe5Ikh+PZAfyPVWHrlkPWOfdZeXtyfh4UB2i2zJ7jmXlynryyLpvEvJS4aTptFodHLQPDs4ODw+3NjNtyS/PDs7aB4Pq12maSqfcQz/9cLGVhYSqNJPqAOvu+sO9stKd0ttXASRCQuU/XHWL55CMeeWUc1ejUtWf+lGeZMI8+6ZaTS50Ic9/KSuppWYdNfFw5073tVbv3lfVqRzl+BgyIn/Wry87LHoN4lnPetaznvWsZz3rWc961rOe9axnrVT/B9V/Y1023f87AAAAAElFTkSuQmCC"/>
+          <p:cNvSpPr>
+            <a:spLocks noChangeAspect="1" noChangeArrowheads="1"/>
+          </p:cNvSpPr>
+          <p:nvPr/>
+        </p:nvSpPr>
+        <p:spPr bwMode="auto">
+          <a:xfrm>
+            <a:off x="155575" y="-144463"/>
+            <a:ext cx="304800" cy="304801"/>
+          </a:xfrm>
+          <a:prstGeom prst="rect">
+            <a:avLst/>
+          </a:prstGeom>
+          <a:noFill/>
+        </p:spPr>
+        <p:txBody>
+          <a:bodyPr vert="horz" wrap="square" lIns="91440" tIns="45720" rIns="91440" bIns="45720" numCol="1" anchor="t" anchorCtr="0" compatLnSpc="1">
+            <a:prstTxWarp prst="textNoShape">
+              <a:avLst/>
+            </a:prstTxWarp>
+          </a:bodyPr>
+          <a:lstStyle/>
+          <a:p>
+            <a:endParaRPr lang="en-US"/>
+          </a:p>
+        </p:txBody>
+      </p:sp>
+    </p:spTree>
+  </p:cSld>
+  <p:clrMapOvr>
+    <a:masterClrMapping/>
+  </p:clrMapOvr>
+</p:sld>
+</file>
+
+<file path=ppt/slides/slide51.xml><?xml version="1.0" encoding="utf-8"?>
 <p:sld xmlns:a="http://schemas.openxmlformats.org/drawingml/2006/main" xmlns:r="http://schemas.openxmlformats.org/officeDocument/2006/relationships" xmlns:p="http://schemas.openxmlformats.org/presentationml/2006/main">
   <p:cSld>
     <p:spTree>
@@ -11846,7 +11905,7 @@
 </p:sld>
 </file>
 
-<file path=ppt/slides/slide51.xml><?xml version="1.0" encoding="utf-8"?>
+<file path=ppt/slides/slide52.xml><?xml version="1.0" encoding="utf-8"?>
 <p:sld xmlns:a="http://schemas.openxmlformats.org/drawingml/2006/main" xmlns:r="http://schemas.openxmlformats.org/officeDocument/2006/relationships" xmlns:p="http://schemas.openxmlformats.org/presentationml/2006/main">
   <p:cSld>
     <p:spTree>
@@ -12086,7 +12145,7 @@
 </p:sld>
 </file>
 
-<file path=ppt/slides/slide52.xml><?xml version="1.0" encoding="utf-8"?>
+<file path=ppt/slides/slide53.xml><?xml version="1.0" encoding="utf-8"?>
 <p:sld xmlns:a="http://schemas.openxmlformats.org/drawingml/2006/main" xmlns:r="http://schemas.openxmlformats.org/officeDocument/2006/relationships" xmlns:p="http://schemas.openxmlformats.org/presentationml/2006/main">
   <p:cSld>
     <p:spTree>
@@ -12145,13 +12204,7 @@
               <a:rPr lang="en-US" sz="2600" dirty="0" smtClean="0">
                 <a:hlinkClick r:id="rId2"/>
               </a:rPr>
-              <a:t>https://app.diagrams.net</a:t>
-            </a:r>
-            <a:r>
-              <a:rPr lang="en-US" sz="2600" dirty="0" smtClean="0">
-                <a:hlinkClick r:id="rId2"/>
-              </a:rPr>
-              <a:t>/</a:t>
+              <a:t>https://app.diagrams.net/</a:t>
             </a:r>
             <a:endParaRPr lang="en-US" sz="2600" dirty="0" smtClean="0"/>
           </a:p>
@@ -12160,19 +12213,7 @@
               <a:rPr lang="en-US" sz="2600" dirty="0" smtClean="0">
                 <a:hlinkClick r:id="rId3"/>
               </a:rPr>
-              <a:t>https</a:t>
-            </a:r>
-            <a:r>
-              <a:rPr lang="en-US" sz="2600" dirty="0" smtClean="0">
-                <a:hlinkClick r:id="rId3"/>
-              </a:rPr>
-              <a:t>://lucid.app</a:t>
-            </a:r>
-            <a:r>
-              <a:rPr lang="en-US" sz="2600" dirty="0" smtClean="0">
-                <a:hlinkClick r:id="rId3"/>
-              </a:rPr>
-              <a:t>/</a:t>
+              <a:t>https://lucid.app/</a:t>
             </a:r>
             <a:endParaRPr lang="en-US" sz="2600" dirty="0" smtClean="0"/>
           </a:p>
@@ -12221,7 +12262,7 @@
 </p:sld>
 </file>
 
-<file path=ppt/slides/slide53.xml><?xml version="1.0" encoding="utf-8"?>
+<file path=ppt/slides/slide54.xml><?xml version="1.0" encoding="utf-8"?>
 <p:sld xmlns:a="http://schemas.openxmlformats.org/drawingml/2006/main" xmlns:r="http://schemas.openxmlformats.org/officeDocument/2006/relationships" xmlns:p="http://schemas.openxmlformats.org/presentationml/2006/main">
   <p:cSld>
     <p:spTree>
